--- a/output_pptx/As_The_Deer.pptx
+++ b/output_pptx/As_The_Deer.pptx
@@ -3118,8 +3118,8 @@
         </p:nvSpPr>
         <p:spPr>
           <a:xfrm>
-            <a:off x="594360" y="1837944"/>
-            <a:ext cx="11002975" cy="685800"/>
+            <a:off x="640080" y="1650492"/>
+            <a:ext cx="10911535" cy="731520"/>
           </a:xfrm>
           <a:prstGeom prst="rect">
             <a:avLst/>
@@ -3134,7 +3134,7 @@
           <a:p>
             <a:pPr algn="ctr"/>
             <a:r>
-              <a:rPr sz="4400" b="1" i="0">
+              <a:rPr sz="4800" b="1" i="0">
                 <a:solidFill>
                   <a:srgbClr val="FFFFFF"/>
                 </a:solidFill>
@@ -3153,8 +3153,8 @@
         </p:nvSpPr>
         <p:spPr>
           <a:xfrm>
-            <a:off x="594360" y="2560320"/>
-            <a:ext cx="11002975" cy="384048"/>
+            <a:off x="640080" y="2418588"/>
+            <a:ext cx="10911535" cy="365760"/>
           </a:xfrm>
           <a:prstGeom prst="rect">
             <a:avLst/>
@@ -3169,9 +3169,9 @@
           <a:p>
             <a:pPr algn="ctr"/>
             <a:r>
-              <a:rPr sz="2290" b="0" i="1">
-                <a:solidFill>
-                  <a:srgbClr val="B4B4B4"/>
+              <a:rPr sz="2400" b="0" i="1">
+                <a:solidFill>
+                  <a:srgbClr val="AAAAAA"/>
                 </a:solidFill>
                 <a:latin typeface="Arial"/>
               </a:rPr>
@@ -3188,8 +3188,8 @@
         </p:nvSpPr>
         <p:spPr>
           <a:xfrm>
-            <a:off x="594360" y="2980944"/>
-            <a:ext cx="11002975" cy="347472"/>
+            <a:off x="640080" y="2985516"/>
+            <a:ext cx="10911535" cy="731520"/>
           </a:xfrm>
           <a:prstGeom prst="rect">
             <a:avLst/>
@@ -3204,13 +3204,13 @@
           <a:p>
             <a:pPr algn="ctr"/>
             <a:r>
-              <a:rPr sz="2000" b="0" i="1">
-                <a:solidFill>
-                  <a:srgbClr val="8C8C8C"/>
+              <a:rPr sz="4800" b="1" i="0">
+                <a:solidFill>
+                  <a:srgbClr val="FFFFFF"/>
                 </a:solidFill>
                 <a:latin typeface="Arial"/>
               </a:rPr>
-              <a:t/>
+              <a:t>主よわがたましい あなたをしたう</a:t>
             </a:r>
           </a:p>
         </p:txBody>
@@ -3223,8 +3223,8 @@
         </p:nvSpPr>
         <p:spPr>
           <a:xfrm>
-            <a:off x="594360" y="3529584"/>
-            <a:ext cx="11002975" cy="685800"/>
+            <a:off x="640080" y="3753612"/>
+            <a:ext cx="10911535" cy="365760"/>
           </a:xfrm>
           <a:prstGeom prst="rect">
             <a:avLst/>
@@ -3239,13 +3239,13 @@
           <a:p>
             <a:pPr algn="ctr"/>
             <a:r>
-              <a:rPr sz="4400" b="1" i="0">
-                <a:solidFill>
-                  <a:srgbClr val="FFFFFF"/>
+              <a:rPr sz="2400" b="0" i="1">
+                <a:solidFill>
+                  <a:srgbClr val="AAAAAA"/>
                 </a:solidFill>
                 <a:latin typeface="Arial"/>
               </a:rPr>
-              <a:t>主よわがたましい あなたをしたう</a:t>
+              <a:t>shu yo waga tamashii anata wo shitau</a:t>
             </a:r>
           </a:p>
         </p:txBody>
@@ -3258,8 +3258,8 @@
         </p:nvSpPr>
         <p:spPr>
           <a:xfrm>
-            <a:off x="594360" y="4251960"/>
-            <a:ext cx="11002975" cy="384048"/>
+            <a:off x="640080" y="4530852"/>
+            <a:ext cx="10911535" cy="310896"/>
           </a:xfrm>
           <a:prstGeom prst="rect">
             <a:avLst/>
@@ -3274,13 +3274,13 @@
           <a:p>
             <a:pPr algn="ctr"/>
             <a:r>
-              <a:rPr sz="2400" b="0" i="1">
-                <a:solidFill>
-                  <a:srgbClr val="B4B4B4"/>
+              <a:rPr sz="2000" b="0" i="1">
+                <a:solidFill>
+                  <a:srgbClr val="828282"/>
                 </a:solidFill>
                 <a:latin typeface="Arial"/>
               </a:rPr>
-              <a:t>shu yo waga tamashii anata wo shitau</a:t>
+              <a:t>Como o Cervo</a:t>
             </a:r>
           </a:p>
         </p:txBody>
@@ -3293,8 +3293,8 @@
         </p:nvSpPr>
         <p:spPr>
           <a:xfrm>
-            <a:off x="594360" y="4672584"/>
-            <a:ext cx="11002975" cy="347472"/>
+            <a:off x="640080" y="4896612"/>
+            <a:ext cx="10911535" cy="310896"/>
           </a:xfrm>
           <a:prstGeom prst="rect">
             <a:avLst/>
@@ -3311,11 +3311,11 @@
             <a:r>
               <a:rPr sz="2000" b="0" i="1">
                 <a:solidFill>
-                  <a:srgbClr val="8C8C8C"/>
+                  <a:srgbClr val="828282"/>
                 </a:solidFill>
                 <a:latin typeface="Arial"/>
               </a:rPr>
-              <a:t/>
+              <a:t>Como o cervo anseia pelas fontes das águas</a:t>
             </a:r>
           </a:p>
         </p:txBody>
@@ -3354,8 +3354,8 @@
         </p:nvSpPr>
         <p:spPr>
           <a:xfrm>
-            <a:off x="594360" y="1837944"/>
-            <a:ext cx="11002975" cy="685800"/>
+            <a:off x="640080" y="1650492"/>
+            <a:ext cx="10911535" cy="731520"/>
           </a:xfrm>
           <a:prstGeom prst="rect">
             <a:avLst/>
@@ -3370,7 +3370,7 @@
           <a:p>
             <a:pPr algn="ctr"/>
             <a:r>
-              <a:rPr sz="4400" b="1" i="0">
+              <a:rPr sz="4800" b="1" i="0">
                 <a:solidFill>
                   <a:srgbClr val="FFFFFF"/>
                 </a:solidFill>
@@ -3389,8 +3389,8 @@
         </p:nvSpPr>
         <p:spPr>
           <a:xfrm>
-            <a:off x="594360" y="2560320"/>
-            <a:ext cx="11002975" cy="384048"/>
+            <a:off x="640080" y="2418588"/>
+            <a:ext cx="10911535" cy="365760"/>
           </a:xfrm>
           <a:prstGeom prst="rect">
             <a:avLst/>
@@ -3407,7 +3407,7 @@
             <a:r>
               <a:rPr sz="2400" b="0" i="1">
                 <a:solidFill>
-                  <a:srgbClr val="B4B4B4"/>
+                  <a:srgbClr val="AAAAAA"/>
                 </a:solidFill>
                 <a:latin typeface="Arial"/>
               </a:rPr>
@@ -3424,8 +3424,8 @@
         </p:nvSpPr>
         <p:spPr>
           <a:xfrm>
-            <a:off x="594360" y="2980944"/>
-            <a:ext cx="11002975" cy="347472"/>
+            <a:off x="640080" y="2985516"/>
+            <a:ext cx="10911535" cy="731520"/>
           </a:xfrm>
           <a:prstGeom prst="rect">
             <a:avLst/>
@@ -3440,13 +3440,13 @@
           <a:p>
             <a:pPr algn="ctr"/>
             <a:r>
-              <a:rPr sz="2000" b="0" i="1">
-                <a:solidFill>
-                  <a:srgbClr val="8C8C8C"/>
+              <a:rPr sz="4800" b="1" i="0">
+                <a:solidFill>
+                  <a:srgbClr val="FFFFFF"/>
                 </a:solidFill>
                 <a:latin typeface="Arial"/>
               </a:rPr>
-              <a:t/>
+              <a:t>あなたこそわがちから</a:t>
             </a:r>
           </a:p>
         </p:txBody>
@@ -3459,8 +3459,8 @@
         </p:nvSpPr>
         <p:spPr>
           <a:xfrm>
-            <a:off x="594360" y="3529584"/>
-            <a:ext cx="11002975" cy="685800"/>
+            <a:off x="640080" y="3753612"/>
+            <a:ext cx="10911535" cy="365760"/>
           </a:xfrm>
           <a:prstGeom prst="rect">
             <a:avLst/>
@@ -3475,13 +3475,13 @@
           <a:p>
             <a:pPr algn="ctr"/>
             <a:r>
-              <a:rPr sz="4400" b="1" i="0">
-                <a:solidFill>
-                  <a:srgbClr val="FFFFFF"/>
+              <a:rPr sz="2400" b="0" i="1">
+                <a:solidFill>
+                  <a:srgbClr val="AAAAAA"/>
                 </a:solidFill>
                 <a:latin typeface="Arial"/>
               </a:rPr>
-              <a:t>あなたこそわがちから</a:t>
+              <a:t>anata koso waga chikara</a:t>
             </a:r>
           </a:p>
         </p:txBody>
@@ -3494,8 +3494,8 @@
         </p:nvSpPr>
         <p:spPr>
           <a:xfrm>
-            <a:off x="594360" y="4251960"/>
-            <a:ext cx="11002975" cy="384048"/>
+            <a:off x="640080" y="4530852"/>
+            <a:ext cx="10911535" cy="310896"/>
           </a:xfrm>
           <a:prstGeom prst="rect">
             <a:avLst/>
@@ -3510,13 +3510,13 @@
           <a:p>
             <a:pPr algn="ctr"/>
             <a:r>
-              <a:rPr sz="2400" b="0" i="1">
-                <a:solidFill>
-                  <a:srgbClr val="B4B4B4"/>
+              <a:rPr sz="2000" b="0" i="1">
+                <a:solidFill>
+                  <a:srgbClr val="828282"/>
                 </a:solidFill>
                 <a:latin typeface="Arial"/>
               </a:rPr>
-              <a:t>anata koso waga chikara</a:t>
+              <a:t>E eu anseio por Te adorar</a:t>
             </a:r>
           </a:p>
         </p:txBody>
@@ -3529,8 +3529,8 @@
         </p:nvSpPr>
         <p:spPr>
           <a:xfrm>
-            <a:off x="594360" y="4672584"/>
-            <a:ext cx="11002975" cy="347472"/>
+            <a:off x="640080" y="4896612"/>
+            <a:ext cx="10911535" cy="310896"/>
           </a:xfrm>
           <a:prstGeom prst="rect">
             <a:avLst/>
@@ -3547,11 +3547,11 @@
             <a:r>
               <a:rPr sz="2000" b="0" i="1">
                 <a:solidFill>
-                  <a:srgbClr val="8C8C8C"/>
+                  <a:srgbClr val="828282"/>
                 </a:solidFill>
                 <a:latin typeface="Arial"/>
               </a:rPr>
-              <a:t/>
+              <a:t>Tu somente és minha força e meu escudo</a:t>
             </a:r>
           </a:p>
         </p:txBody>
@@ -3590,8 +3590,8 @@
         </p:nvSpPr>
         <p:spPr>
           <a:xfrm>
-            <a:off x="594360" y="1837944"/>
-            <a:ext cx="11002975" cy="685800"/>
+            <a:off x="640080" y="1650492"/>
+            <a:ext cx="10911535" cy="731520"/>
           </a:xfrm>
           <a:prstGeom prst="rect">
             <a:avLst/>
@@ -3606,7 +3606,7 @@
           <a:p>
             <a:pPr algn="ctr"/>
             <a:r>
-              <a:rPr sz="4400" b="1" i="0">
+              <a:rPr sz="4800" b="1" i="0">
                 <a:solidFill>
                   <a:srgbClr val="FFFFFF"/>
                 </a:solidFill>
@@ -3625,8 +3625,8 @@
         </p:nvSpPr>
         <p:spPr>
           <a:xfrm>
-            <a:off x="594360" y="2560320"/>
-            <a:ext cx="11002975" cy="384048"/>
+            <a:off x="640080" y="2418588"/>
+            <a:ext cx="10911535" cy="365760"/>
           </a:xfrm>
           <a:prstGeom prst="rect">
             <a:avLst/>
@@ -3643,7 +3643,7 @@
             <a:r>
               <a:rPr sz="2400" b="0" i="1">
                 <a:solidFill>
-                  <a:srgbClr val="B4B4B4"/>
+                  <a:srgbClr val="AAAAAA"/>
                 </a:solidFill>
                 <a:latin typeface="Arial"/>
               </a:rPr>
@@ -3660,8 +3660,8 @@
         </p:nvSpPr>
         <p:spPr>
           <a:xfrm>
-            <a:off x="594360" y="2980944"/>
-            <a:ext cx="11002975" cy="347472"/>
+            <a:off x="640080" y="2985516"/>
+            <a:ext cx="10911535" cy="731520"/>
           </a:xfrm>
           <a:prstGeom prst="rect">
             <a:avLst/>
@@ -3676,13 +3676,13 @@
           <a:p>
             <a:pPr algn="ctr"/>
             <a:r>
-              <a:rPr sz="2000" b="0" i="1">
-                <a:solidFill>
-                  <a:srgbClr val="8C8C8C"/>
+              <a:rPr sz="4800" b="1" i="0">
+                <a:solidFill>
+                  <a:srgbClr val="FFFFFF"/>
                 </a:solidFill>
                 <a:latin typeface="Arial"/>
               </a:rPr>
-              <a:t/>
+              <a:t>われは主をあおぐ</a:t>
             </a:r>
           </a:p>
         </p:txBody>
@@ -3695,8 +3695,8 @@
         </p:nvSpPr>
         <p:spPr>
           <a:xfrm>
-            <a:off x="594360" y="3529584"/>
-            <a:ext cx="11002975" cy="685800"/>
+            <a:off x="640080" y="3753612"/>
+            <a:ext cx="10911535" cy="365760"/>
           </a:xfrm>
           <a:prstGeom prst="rect">
             <a:avLst/>
@@ -3711,13 +3711,13 @@
           <a:p>
             <a:pPr algn="ctr"/>
             <a:r>
-              <a:rPr sz="4400" b="1" i="0">
-                <a:solidFill>
-                  <a:srgbClr val="FFFFFF"/>
+              <a:rPr sz="2400" b="0" i="1">
+                <a:solidFill>
+                  <a:srgbClr val="AAAAAA"/>
                 </a:solidFill>
                 <a:latin typeface="Arial"/>
               </a:rPr>
-              <a:t>われは主をあおぐ</a:t>
+              <a:t>ware ha shu wo aogu</a:t>
             </a:r>
           </a:p>
         </p:txBody>
@@ -3730,8 +3730,8 @@
         </p:nvSpPr>
         <p:spPr>
           <a:xfrm>
-            <a:off x="594360" y="4251960"/>
-            <a:ext cx="11002975" cy="384048"/>
+            <a:off x="640080" y="4530852"/>
+            <a:ext cx="10911535" cy="310896"/>
           </a:xfrm>
           <a:prstGeom prst="rect">
             <a:avLst/>
@@ -3746,13 +3746,13 @@
           <a:p>
             <a:pPr algn="ctr"/>
             <a:r>
-              <a:rPr sz="2400" b="0" i="1">
-                <a:solidFill>
-                  <a:srgbClr val="B4B4B4"/>
+              <a:rPr sz="2000" b="0" i="1">
+                <a:solidFill>
+                  <a:srgbClr val="828282"/>
                 </a:solidFill>
                 <a:latin typeface="Arial"/>
               </a:rPr>
-              <a:t>ware ha shu wo aogu</a:t>
+              <a:t>Por Ti somente meu espírito se rende</a:t>
             </a:r>
           </a:p>
         </p:txBody>
@@ -3765,8 +3765,8 @@
         </p:nvSpPr>
         <p:spPr>
           <a:xfrm>
-            <a:off x="594360" y="4672584"/>
-            <a:ext cx="11002975" cy="347472"/>
+            <a:off x="640080" y="4896612"/>
+            <a:ext cx="10911535" cy="310896"/>
           </a:xfrm>
           <a:prstGeom prst="rect">
             <a:avLst/>
@@ -3783,11 +3783,11 @@
             <a:r>
               <a:rPr sz="2000" b="0" i="1">
                 <a:solidFill>
-                  <a:srgbClr val="8C8C8C"/>
+                  <a:srgbClr val="828282"/>
                 </a:solidFill>
                 <a:latin typeface="Arial"/>
               </a:rPr>
-              <a:t/>
+              <a:t>Somente Tu és o desejo do meu coração</a:t>
             </a:r>
           </a:p>
         </p:txBody>
@@ -3826,8 +3826,8 @@
         </p:nvSpPr>
         <p:spPr>
           <a:xfrm>
-            <a:off x="594360" y="2258568"/>
-            <a:ext cx="11002975" cy="685800"/>
+            <a:off x="640080" y="2052828"/>
+            <a:ext cx="10911535" cy="731520"/>
           </a:xfrm>
           <a:prstGeom prst="rect">
             <a:avLst/>
@@ -3842,7 +3842,7 @@
           <a:p>
             <a:pPr algn="ctr"/>
             <a:r>
-              <a:rPr sz="4400" b="1" i="0">
+              <a:rPr sz="4800" b="1" i="0">
                 <a:solidFill>
                   <a:srgbClr val="FFFFFF"/>
                 </a:solidFill>
@@ -3861,8 +3861,8 @@
         </p:nvSpPr>
         <p:spPr>
           <a:xfrm>
-            <a:off x="594360" y="2980944"/>
-            <a:ext cx="11002975" cy="347472"/>
+            <a:off x="640080" y="2985516"/>
+            <a:ext cx="10911535" cy="731520"/>
           </a:xfrm>
           <a:prstGeom prst="rect">
             <a:avLst/>
@@ -3877,13 +3877,13 @@
           <a:p>
             <a:pPr algn="ctr"/>
             <a:r>
-              <a:rPr sz="2200" b="0" i="1">
-                <a:solidFill>
-                  <a:srgbClr val="8C8C8C"/>
+              <a:rPr sz="4000" b="1" i="0">
+                <a:solidFill>
+                  <a:srgbClr val="FFFFFF"/>
                 </a:solidFill>
                 <a:latin typeface="Arial"/>
               </a:rPr>
-              <a:t/>
+              <a:t>Tu somente és minha força e meu escudo</a:t>
             </a:r>
           </a:p>
         </p:txBody>
@@ -3896,8 +3896,8 @@
         </p:nvSpPr>
         <p:spPr>
           <a:xfrm>
-            <a:off x="594360" y="3529584"/>
-            <a:ext cx="11002975" cy="685800"/>
+            <a:off x="640080" y="4128516"/>
+            <a:ext cx="10911535" cy="310896"/>
           </a:xfrm>
           <a:prstGeom prst="rect">
             <a:avLst/>
@@ -3912,13 +3912,13 @@
           <a:p>
             <a:pPr algn="ctr"/>
             <a:r>
-              <a:rPr sz="3705" b="1" i="0">
-                <a:solidFill>
-                  <a:srgbClr val="FFFFFF"/>
+              <a:rPr sz="2000" b="0" i="0">
+                <a:solidFill>
+                  <a:srgbClr val="828282"/>
                 </a:solidFill>
                 <a:latin typeface="Arial"/>
               </a:rPr>
-              <a:t>Tu somente és minha força e meu escudo</a:t>
+              <a:t>あなたこそわがたて</a:t>
             </a:r>
           </a:p>
         </p:txBody>
@@ -3931,8 +3931,8 @@
         </p:nvSpPr>
         <p:spPr>
           <a:xfrm>
-            <a:off x="594360" y="4251960"/>
-            <a:ext cx="11002975" cy="347472"/>
+            <a:off x="640080" y="4494276"/>
+            <a:ext cx="10911535" cy="310896"/>
           </a:xfrm>
           <a:prstGeom prst="rect">
             <a:avLst/>
@@ -3947,13 +3947,13 @@
           <a:p>
             <a:pPr algn="ctr"/>
             <a:r>
-              <a:rPr sz="2200" b="0" i="1">
-                <a:solidFill>
-                  <a:srgbClr val="8C8C8C"/>
+              <a:rPr sz="2000" b="0" i="0">
+                <a:solidFill>
+                  <a:srgbClr val="828282"/>
                 </a:solidFill>
                 <a:latin typeface="Arial"/>
               </a:rPr>
-              <a:t/>
+              <a:t>あなたこそわがちから</a:t>
             </a:r>
           </a:p>
         </p:txBody>
@@ -3992,8 +3992,8 @@
         </p:nvSpPr>
         <p:spPr>
           <a:xfrm>
-            <a:off x="594360" y="2258568"/>
-            <a:ext cx="11002975" cy="685800"/>
+            <a:off x="640080" y="2052828"/>
+            <a:ext cx="10911535" cy="731520"/>
           </a:xfrm>
           <a:prstGeom prst="rect">
             <a:avLst/>
@@ -4008,7 +4008,7 @@
           <a:p>
             <a:pPr algn="ctr"/>
             <a:r>
-              <a:rPr sz="3911" b="1" i="0">
+              <a:rPr sz="4200" b="1" i="0">
                 <a:solidFill>
                   <a:srgbClr val="FFFFFF"/>
                 </a:solidFill>
@@ -4027,8 +4027,8 @@
         </p:nvSpPr>
         <p:spPr>
           <a:xfrm>
-            <a:off x="594360" y="2980944"/>
-            <a:ext cx="11002975" cy="347472"/>
+            <a:off x="640080" y="2985516"/>
+            <a:ext cx="10911535" cy="731520"/>
           </a:xfrm>
           <a:prstGeom prst="rect">
             <a:avLst/>
@@ -4043,13 +4043,13 @@
           <a:p>
             <a:pPr algn="ctr"/>
             <a:r>
-              <a:rPr sz="2200" b="0" i="1">
-                <a:solidFill>
-                  <a:srgbClr val="8C8C8C"/>
+              <a:rPr sz="4100" b="1" i="0">
+                <a:solidFill>
+                  <a:srgbClr val="FFFFFF"/>
                 </a:solidFill>
                 <a:latin typeface="Arial"/>
               </a:rPr>
-              <a:t/>
+              <a:t>Somente Tu és o desejo do meu coração</a:t>
             </a:r>
           </a:p>
         </p:txBody>
@@ -4062,8 +4062,8 @@
         </p:nvSpPr>
         <p:spPr>
           <a:xfrm>
-            <a:off x="594360" y="3529584"/>
-            <a:ext cx="11002975" cy="685800"/>
+            <a:off x="640080" y="4128516"/>
+            <a:ext cx="10911535" cy="310896"/>
           </a:xfrm>
           <a:prstGeom prst="rect">
             <a:avLst/>
@@ -4078,13 +4078,13 @@
           <a:p>
             <a:pPr algn="ctr"/>
             <a:r>
-              <a:rPr sz="3805" b="1" i="0">
-                <a:solidFill>
-                  <a:srgbClr val="FFFFFF"/>
+              <a:rPr sz="2000" b="0" i="0">
+                <a:solidFill>
+                  <a:srgbClr val="828282"/>
                 </a:solidFill>
                 <a:latin typeface="Arial"/>
               </a:rPr>
-              <a:t>Somente Tu és o desejo do meu coração</a:t>
+              <a:t>あなたこそわがのぞみ</a:t>
             </a:r>
           </a:p>
         </p:txBody>
@@ -4097,8 +4097,8 @@
         </p:nvSpPr>
         <p:spPr>
           <a:xfrm>
-            <a:off x="594360" y="4251960"/>
-            <a:ext cx="11002975" cy="347472"/>
+            <a:off x="640080" y="4494276"/>
+            <a:ext cx="10911535" cy="310896"/>
           </a:xfrm>
           <a:prstGeom prst="rect">
             <a:avLst/>
@@ -4113,13 +4113,13 @@
           <a:p>
             <a:pPr algn="ctr"/>
             <a:r>
-              <a:rPr sz="2200" b="0" i="1">
-                <a:solidFill>
-                  <a:srgbClr val="8C8C8C"/>
+              <a:rPr sz="2000" b="0" i="0">
+                <a:solidFill>
+                  <a:srgbClr val="828282"/>
                 </a:solidFill>
                 <a:latin typeface="Arial"/>
               </a:rPr>
-              <a:t/>
+              <a:t>われは主をあおぐ</a:t>
             </a:r>
           </a:p>
         </p:txBody>
@@ -4158,8 +4158,8 @@
         </p:nvSpPr>
         <p:spPr>
           <a:xfrm>
-            <a:off x="594360" y="2258568"/>
-            <a:ext cx="11002975" cy="685800"/>
+            <a:off x="640080" y="2052828"/>
+            <a:ext cx="10911535" cy="731520"/>
           </a:xfrm>
           <a:prstGeom prst="rect">
             <a:avLst/>
@@ -4174,7 +4174,7 @@
           <a:p>
             <a:pPr algn="ctr"/>
             <a:r>
-              <a:rPr sz="4400" b="1" i="0">
+              <a:rPr sz="4800" b="1" i="0">
                 <a:solidFill>
                   <a:srgbClr val="FFFFFF"/>
                 </a:solidFill>
@@ -4193,8 +4193,8 @@
         </p:nvSpPr>
         <p:spPr>
           <a:xfrm>
-            <a:off x="594360" y="2980944"/>
-            <a:ext cx="11002975" cy="347472"/>
+            <a:off x="640080" y="2985516"/>
+            <a:ext cx="10911535" cy="731520"/>
           </a:xfrm>
           <a:prstGeom prst="rect">
             <a:avLst/>
@@ -4209,83 +4209,13 @@
           <a:p>
             <a:pPr algn="ctr"/>
             <a:r>
-              <a:rPr sz="2200" b="0" i="1">
-                <a:solidFill>
-                  <a:srgbClr val="8C8C8C"/>
-                </a:solidFill>
-                <a:latin typeface="Arial"/>
-              </a:rPr>
-              <a:t/>
-            </a:r>
-          </a:p>
-        </p:txBody>
-      </p:sp>
-      <p:sp>
-        <p:nvSpPr>
-          <p:cNvPr id="4" name="TextBox 3"/>
-          <p:cNvSpPr txBox="1"/>
-          <p:nvPr/>
-        </p:nvSpPr>
-        <p:spPr>
-          <a:xfrm>
-            <a:off x="594360" y="3529584"/>
-            <a:ext cx="11002975" cy="685800"/>
-          </a:xfrm>
-          <a:prstGeom prst="rect">
-            <a:avLst/>
-          </a:prstGeom>
-          <a:noFill/>
-        </p:spPr>
-        <p:txBody>
-          <a:bodyPr wrap="square">
-            <a:spAutoFit/>
-          </a:bodyPr>
-          <a:lstStyle/>
-          <a:p>
-            <a:pPr algn="ctr"/>
-            <a:r>
-              <a:rPr sz="4400" b="1" i="0">
+              <a:rPr sz="4800" b="1" i="0">
                 <a:solidFill>
                   <a:srgbClr val="FFFFFF"/>
                 </a:solidFill>
                 <a:latin typeface="Arial"/>
               </a:rPr>
               <a:t>E eu anseio por Te adorar</a:t>
-            </a:r>
-          </a:p>
-        </p:txBody>
-      </p:sp>
-      <p:sp>
-        <p:nvSpPr>
-          <p:cNvPr id="5" name="TextBox 4"/>
-          <p:cNvSpPr txBox="1"/>
-          <p:nvPr/>
-        </p:nvSpPr>
-        <p:spPr>
-          <a:xfrm>
-            <a:off x="594360" y="4251960"/>
-            <a:ext cx="11002975" cy="347472"/>
-          </a:xfrm>
-          <a:prstGeom prst="rect">
-            <a:avLst/>
-          </a:prstGeom>
-          <a:noFill/>
-        </p:spPr>
-        <p:txBody>
-          <a:bodyPr wrap="square">
-            <a:spAutoFit/>
-          </a:bodyPr>
-          <a:lstStyle/>
-          <a:p>
-            <a:pPr algn="ctr"/>
-            <a:r>
-              <a:rPr sz="2200" b="0" i="1">
-                <a:solidFill>
-                  <a:srgbClr val="8C8C8C"/>
-                </a:solidFill>
-                <a:latin typeface="Arial"/>
-              </a:rPr>
-              <a:t/>
             </a:r>
           </a:p>
         </p:txBody>
@@ -4324,8 +4254,8 @@
         </p:nvSpPr>
         <p:spPr>
           <a:xfrm>
-            <a:off x="594360" y="2258568"/>
-            <a:ext cx="11002975" cy="685800"/>
+            <a:off x="640080" y="2052828"/>
+            <a:ext cx="10911535" cy="731520"/>
           </a:xfrm>
           <a:prstGeom prst="rect">
             <a:avLst/>
@@ -4340,7 +4270,7 @@
           <a:p>
             <a:pPr algn="ctr"/>
             <a:r>
-              <a:rPr sz="4400" b="1" i="0">
+              <a:rPr sz="4800" b="1" i="0">
                 <a:solidFill>
                   <a:srgbClr val="FFFFFF"/>
                 </a:solidFill>
@@ -4359,8 +4289,8 @@
         </p:nvSpPr>
         <p:spPr>
           <a:xfrm>
-            <a:off x="594360" y="2980944"/>
-            <a:ext cx="11002975" cy="347472"/>
+            <a:off x="640080" y="2985516"/>
+            <a:ext cx="10911535" cy="731520"/>
           </a:xfrm>
           <a:prstGeom prst="rect">
             <a:avLst/>
@@ -4375,83 +4305,13 @@
           <a:p>
             <a:pPr algn="ctr"/>
             <a:r>
-              <a:rPr sz="2200" b="0" i="1">
-                <a:solidFill>
-                  <a:srgbClr val="8C8C8C"/>
-                </a:solidFill>
-                <a:latin typeface="Arial"/>
-              </a:rPr>
-              <a:t/>
-            </a:r>
-          </a:p>
-        </p:txBody>
-      </p:sp>
-      <p:sp>
-        <p:nvSpPr>
-          <p:cNvPr id="4" name="TextBox 3"/>
-          <p:cNvSpPr txBox="1"/>
-          <p:nvPr/>
-        </p:nvSpPr>
-        <p:spPr>
-          <a:xfrm>
-            <a:off x="594360" y="3529584"/>
-            <a:ext cx="11002975" cy="685800"/>
-          </a:xfrm>
-          <a:prstGeom prst="rect">
-            <a:avLst/>
-          </a:prstGeom>
-          <a:noFill/>
-        </p:spPr>
-        <p:txBody>
-          <a:bodyPr wrap="square">
-            <a:spAutoFit/>
-          </a:bodyPr>
-          <a:lstStyle/>
-          <a:p>
-            <a:pPr algn="ctr"/>
-            <a:r>
-              <a:rPr sz="4400" b="1" i="0">
+              <a:rPr sz="4800" b="1" i="0">
                 <a:solidFill>
                   <a:srgbClr val="FFFFFF"/>
                 </a:solidFill>
                 <a:latin typeface="Arial"/>
               </a:rPr>
               <a:t>E eu anseio por Te adorar</a:t>
-            </a:r>
-          </a:p>
-        </p:txBody>
-      </p:sp>
-      <p:sp>
-        <p:nvSpPr>
-          <p:cNvPr id="5" name="TextBox 4"/>
-          <p:cNvSpPr txBox="1"/>
-          <p:nvPr/>
-        </p:nvSpPr>
-        <p:spPr>
-          <a:xfrm>
-            <a:off x="594360" y="4251960"/>
-            <a:ext cx="11002975" cy="347472"/>
-          </a:xfrm>
-          <a:prstGeom prst="rect">
-            <a:avLst/>
-          </a:prstGeom>
-          <a:noFill/>
-        </p:spPr>
-        <p:txBody>
-          <a:bodyPr wrap="square">
-            <a:spAutoFit/>
-          </a:bodyPr>
-          <a:lstStyle/>
-          <a:p>
-            <a:pPr algn="ctr"/>
-            <a:r>
-              <a:rPr sz="2200" b="0" i="1">
-                <a:solidFill>
-                  <a:srgbClr val="8C8C8C"/>
-                </a:solidFill>
-                <a:latin typeface="Arial"/>
-              </a:rPr>
-              <a:t/>
             </a:r>
           </a:p>
         </p:txBody>
@@ -4490,8 +4350,8 @@
         </p:nvSpPr>
         <p:spPr>
           <a:xfrm>
-            <a:off x="594360" y="2258568"/>
-            <a:ext cx="11002975" cy="685800"/>
+            <a:off x="640080" y="2052828"/>
+            <a:ext cx="10911535" cy="731520"/>
           </a:xfrm>
           <a:prstGeom prst="rect">
             <a:avLst/>
@@ -4506,7 +4366,7 @@
           <a:p>
             <a:pPr algn="ctr"/>
             <a:r>
-              <a:rPr sz="4400" b="1" i="0">
+              <a:rPr sz="4800" b="1" i="0">
                 <a:solidFill>
                   <a:srgbClr val="FFFFFF"/>
                 </a:solidFill>
@@ -4525,8 +4385,8 @@
         </p:nvSpPr>
         <p:spPr>
           <a:xfrm>
-            <a:off x="594360" y="2980944"/>
-            <a:ext cx="11002975" cy="347472"/>
+            <a:off x="640080" y="2985516"/>
+            <a:ext cx="10911535" cy="731520"/>
           </a:xfrm>
           <a:prstGeom prst="rect">
             <a:avLst/>
@@ -4541,13 +4401,13 @@
           <a:p>
             <a:pPr algn="ctr"/>
             <a:r>
-              <a:rPr sz="2200" b="0" i="1">
-                <a:solidFill>
-                  <a:srgbClr val="8C8C8C"/>
+              <a:rPr sz="3600" b="1" i="0">
+                <a:solidFill>
+                  <a:srgbClr val="FFFFFF"/>
                 </a:solidFill>
                 <a:latin typeface="Arial"/>
               </a:rPr>
-              <a:t/>
+              <a:t>Como o cervo anseia pelas fontes das águas</a:t>
             </a:r>
           </a:p>
         </p:txBody>
@@ -4560,8 +4420,8 @@
         </p:nvSpPr>
         <p:spPr>
           <a:xfrm>
-            <a:off x="594360" y="3529584"/>
-            <a:ext cx="11002975" cy="685800"/>
+            <a:off x="640080" y="4128516"/>
+            <a:ext cx="10911535" cy="310896"/>
           </a:xfrm>
           <a:prstGeom prst="rect">
             <a:avLst/>
@@ -4576,13 +4436,13 @@
           <a:p>
             <a:pPr algn="ctr"/>
             <a:r>
-              <a:rPr sz="3352" b="1" i="0">
-                <a:solidFill>
-                  <a:srgbClr val="FFFFFF"/>
+              <a:rPr sz="2000" b="0" i="0">
+                <a:solidFill>
+                  <a:srgbClr val="828282"/>
                 </a:solidFill>
                 <a:latin typeface="Arial"/>
               </a:rPr>
-              <a:t>Como o cervo anseia pelas fontes das águas</a:t>
+              <a:t>たにがわの流れをしたう鹿のように</a:t>
             </a:r>
           </a:p>
         </p:txBody>
@@ -4595,8 +4455,8 @@
         </p:nvSpPr>
         <p:spPr>
           <a:xfrm>
-            <a:off x="594360" y="4251960"/>
-            <a:ext cx="11002975" cy="347472"/>
+            <a:off x="640080" y="4494276"/>
+            <a:ext cx="10911535" cy="310896"/>
           </a:xfrm>
           <a:prstGeom prst="rect">
             <a:avLst/>
@@ -4611,13 +4471,13 @@
           <a:p>
             <a:pPr algn="ctr"/>
             <a:r>
-              <a:rPr sz="2200" b="0" i="1">
-                <a:solidFill>
-                  <a:srgbClr val="8C8C8C"/>
+              <a:rPr sz="2000" b="0" i="0">
+                <a:solidFill>
+                  <a:srgbClr val="828282"/>
                 </a:solidFill>
                 <a:latin typeface="Arial"/>
               </a:rPr>
-              <a:t/>
+              <a:t>主よわがたましい あなたをしたう</a:t>
             </a:r>
           </a:p>
         </p:txBody>
@@ -4656,8 +4516,8 @@
         </p:nvSpPr>
         <p:spPr>
           <a:xfrm>
-            <a:off x="594360" y="2258568"/>
-            <a:ext cx="11002975" cy="685800"/>
+            <a:off x="640080" y="2052828"/>
+            <a:ext cx="10911535" cy="731520"/>
           </a:xfrm>
           <a:prstGeom prst="rect">
             <a:avLst/>
@@ -4672,7 +4532,7 @@
           <a:p>
             <a:pPr algn="ctr"/>
             <a:r>
-              <a:rPr sz="3520" b="1" i="0">
+              <a:rPr sz="3800" b="1" i="0">
                 <a:solidFill>
                   <a:srgbClr val="FFFFFF"/>
                 </a:solidFill>
@@ -4691,8 +4551,8 @@
         </p:nvSpPr>
         <p:spPr>
           <a:xfrm>
-            <a:off x="594360" y="2980944"/>
-            <a:ext cx="11002975" cy="347472"/>
+            <a:off x="640080" y="2985516"/>
+            <a:ext cx="10911535" cy="731520"/>
           </a:xfrm>
           <a:prstGeom prst="rect">
             <a:avLst/>
@@ -4707,13 +4567,13 @@
           <a:p>
             <a:pPr algn="ctr"/>
             <a:r>
-              <a:rPr sz="2200" b="0" i="1">
-                <a:solidFill>
-                  <a:srgbClr val="8C8C8C"/>
+              <a:rPr sz="4100" b="1" i="0">
+                <a:solidFill>
+                  <a:srgbClr val="FFFFFF"/>
                 </a:solidFill>
                 <a:latin typeface="Arial"/>
               </a:rPr>
-              <a:t/>
+              <a:t>Somente Tu és o desejo do meu coração</a:t>
             </a:r>
           </a:p>
         </p:txBody>
@@ -4726,8 +4586,8 @@
         </p:nvSpPr>
         <p:spPr>
           <a:xfrm>
-            <a:off x="594360" y="3529584"/>
-            <a:ext cx="11002975" cy="685800"/>
+            <a:off x="640080" y="4128516"/>
+            <a:ext cx="10911535" cy="310896"/>
           </a:xfrm>
           <a:prstGeom prst="rect">
             <a:avLst/>
@@ -4742,13 +4602,13 @@
           <a:p>
             <a:pPr algn="ctr"/>
             <a:r>
-              <a:rPr sz="3805" b="1" i="0">
-                <a:solidFill>
-                  <a:srgbClr val="FFFFFF"/>
+              <a:rPr sz="2000" b="0" i="0">
+                <a:solidFill>
+                  <a:srgbClr val="828282"/>
                 </a:solidFill>
                 <a:latin typeface="Arial"/>
               </a:rPr>
-              <a:t>Somente Tu és o desejo do meu coração</a:t>
+              <a:t>たにがわの流れをしたう鹿のように</a:t>
             </a:r>
           </a:p>
         </p:txBody>
@@ -4761,8 +4621,8 @@
         </p:nvSpPr>
         <p:spPr>
           <a:xfrm>
-            <a:off x="594360" y="4251960"/>
-            <a:ext cx="11002975" cy="347472"/>
+            <a:off x="640080" y="4494276"/>
+            <a:ext cx="10911535" cy="310896"/>
           </a:xfrm>
           <a:prstGeom prst="rect">
             <a:avLst/>
@@ -4777,13 +4637,13 @@
           <a:p>
             <a:pPr algn="ctr"/>
             <a:r>
-              <a:rPr sz="2200" b="0" i="1">
-                <a:solidFill>
-                  <a:srgbClr val="8C8C8C"/>
+              <a:rPr sz="2000" b="0" i="0">
+                <a:solidFill>
+                  <a:srgbClr val="828282"/>
                 </a:solidFill>
                 <a:latin typeface="Arial"/>
               </a:rPr>
-              <a:t/>
+              <a:t>主よわがたましい あなたを</a:t>
             </a:r>
           </a:p>
         </p:txBody>
@@ -4822,8 +4682,8 @@
         </p:nvSpPr>
         <p:spPr>
           <a:xfrm>
-            <a:off x="594360" y="2258568"/>
-            <a:ext cx="11002975" cy="685800"/>
+            <a:off x="640080" y="2052828"/>
+            <a:ext cx="10911535" cy="731520"/>
           </a:xfrm>
           <a:prstGeom prst="rect">
             <a:avLst/>
@@ -4838,7 +4698,7 @@
           <a:p>
             <a:pPr algn="ctr"/>
             <a:r>
-              <a:rPr sz="4400" b="1" i="0">
+              <a:rPr sz="4800" b="1" i="0">
                 <a:solidFill>
                   <a:srgbClr val="FFFFFF"/>
                 </a:solidFill>
@@ -4857,8 +4717,8 @@
         </p:nvSpPr>
         <p:spPr>
           <a:xfrm>
-            <a:off x="594360" y="2980944"/>
-            <a:ext cx="11002975" cy="347472"/>
+            <a:off x="640080" y="2985516"/>
+            <a:ext cx="10911535" cy="731520"/>
           </a:xfrm>
           <a:prstGeom prst="rect">
             <a:avLst/>
@@ -4873,13 +4733,13 @@
           <a:p>
             <a:pPr algn="ctr"/>
             <a:r>
-              <a:rPr sz="2200" b="0" i="1">
-                <a:solidFill>
-                  <a:srgbClr val="8C8C8C"/>
+              <a:rPr sz="4000" b="1" i="0">
+                <a:solidFill>
+                  <a:srgbClr val="FFFFFF"/>
                 </a:solidFill>
                 <a:latin typeface="Arial"/>
               </a:rPr>
-              <a:t/>
+              <a:t>Tu somente és minha força e meu escudo</a:t>
             </a:r>
           </a:p>
         </p:txBody>
@@ -4892,8 +4752,8 @@
         </p:nvSpPr>
         <p:spPr>
           <a:xfrm>
-            <a:off x="594360" y="3529584"/>
-            <a:ext cx="11002975" cy="685800"/>
+            <a:off x="640080" y="4128516"/>
+            <a:ext cx="10911535" cy="310896"/>
           </a:xfrm>
           <a:prstGeom prst="rect">
             <a:avLst/>
@@ -4908,13 +4768,13 @@
           <a:p>
             <a:pPr algn="ctr"/>
             <a:r>
-              <a:rPr sz="3705" b="1" i="0">
-                <a:solidFill>
-                  <a:srgbClr val="FFFFFF"/>
+              <a:rPr sz="2000" b="0" i="0">
+                <a:solidFill>
+                  <a:srgbClr val="828282"/>
                 </a:solidFill>
                 <a:latin typeface="Arial"/>
               </a:rPr>
-              <a:t>Tu somente és minha força e meu escudo</a:t>
+              <a:t>あなたこそわがたて</a:t>
             </a:r>
           </a:p>
         </p:txBody>
@@ -4927,8 +4787,8 @@
         </p:nvSpPr>
         <p:spPr>
           <a:xfrm>
-            <a:off x="594360" y="4251960"/>
-            <a:ext cx="11002975" cy="347472"/>
+            <a:off x="640080" y="4494276"/>
+            <a:ext cx="10911535" cy="310896"/>
           </a:xfrm>
           <a:prstGeom prst="rect">
             <a:avLst/>
@@ -4943,13 +4803,13 @@
           <a:p>
             <a:pPr algn="ctr"/>
             <a:r>
-              <a:rPr sz="2200" b="0" i="1">
-                <a:solidFill>
-                  <a:srgbClr val="8C8C8C"/>
+              <a:rPr sz="2000" b="0" i="0">
+                <a:solidFill>
+                  <a:srgbClr val="828282"/>
                 </a:solidFill>
                 <a:latin typeface="Arial"/>
               </a:rPr>
-              <a:t/>
+              <a:t>あなたこそわがちから</a:t>
             </a:r>
           </a:p>
         </p:txBody>
@@ -4988,8 +4848,8 @@
         </p:nvSpPr>
         <p:spPr>
           <a:xfrm>
-            <a:off x="594360" y="2258568"/>
-            <a:ext cx="11002975" cy="685800"/>
+            <a:off x="640080" y="2052828"/>
+            <a:ext cx="10911535" cy="731520"/>
           </a:xfrm>
           <a:prstGeom prst="rect">
             <a:avLst/>
@@ -5004,7 +4864,7 @@
           <a:p>
             <a:pPr algn="ctr"/>
             <a:r>
-              <a:rPr sz="3911" b="1" i="0">
+              <a:rPr sz="4200" b="1" i="0">
                 <a:solidFill>
                   <a:srgbClr val="FFFFFF"/>
                 </a:solidFill>
@@ -5023,8 +4883,8 @@
         </p:nvSpPr>
         <p:spPr>
           <a:xfrm>
-            <a:off x="594360" y="2980944"/>
-            <a:ext cx="11002975" cy="347472"/>
+            <a:off x="640080" y="2985516"/>
+            <a:ext cx="10911535" cy="731520"/>
           </a:xfrm>
           <a:prstGeom prst="rect">
             <a:avLst/>
@@ -5039,13 +4899,13 @@
           <a:p>
             <a:pPr algn="ctr"/>
             <a:r>
-              <a:rPr sz="2200" b="0" i="1">
-                <a:solidFill>
-                  <a:srgbClr val="8C8C8C"/>
+              <a:rPr sz="4100" b="1" i="0">
+                <a:solidFill>
+                  <a:srgbClr val="FFFFFF"/>
                 </a:solidFill>
                 <a:latin typeface="Arial"/>
               </a:rPr>
-              <a:t/>
+              <a:t>Somente Tu és o desejo do meu coração</a:t>
             </a:r>
           </a:p>
         </p:txBody>
@@ -5058,8 +4918,8 @@
         </p:nvSpPr>
         <p:spPr>
           <a:xfrm>
-            <a:off x="594360" y="3529584"/>
-            <a:ext cx="11002975" cy="685800"/>
+            <a:off x="640080" y="4128516"/>
+            <a:ext cx="10911535" cy="310896"/>
           </a:xfrm>
           <a:prstGeom prst="rect">
             <a:avLst/>
@@ -5074,13 +4934,13 @@
           <a:p>
             <a:pPr algn="ctr"/>
             <a:r>
-              <a:rPr sz="3805" b="1" i="0">
-                <a:solidFill>
-                  <a:srgbClr val="FFFFFF"/>
+              <a:rPr sz="2000" b="0" i="0">
+                <a:solidFill>
+                  <a:srgbClr val="828282"/>
                 </a:solidFill>
                 <a:latin typeface="Arial"/>
               </a:rPr>
-              <a:t>Somente Tu és o desejo do meu coração</a:t>
+              <a:t>あなたこそわがのぞみ</a:t>
             </a:r>
           </a:p>
         </p:txBody>
@@ -5093,8 +4953,8 @@
         </p:nvSpPr>
         <p:spPr>
           <a:xfrm>
-            <a:off x="594360" y="4251960"/>
-            <a:ext cx="11002975" cy="347472"/>
+            <a:off x="640080" y="4494276"/>
+            <a:ext cx="10911535" cy="310896"/>
           </a:xfrm>
           <a:prstGeom prst="rect">
             <a:avLst/>
@@ -5109,13 +4969,13 @@
           <a:p>
             <a:pPr algn="ctr"/>
             <a:r>
-              <a:rPr sz="2200" b="0" i="1">
-                <a:solidFill>
-                  <a:srgbClr val="8C8C8C"/>
+              <a:rPr sz="2000" b="0" i="0">
+                <a:solidFill>
+                  <a:srgbClr val="828282"/>
                 </a:solidFill>
                 <a:latin typeface="Arial"/>
               </a:rPr>
-              <a:t/>
+              <a:t>われは主をあおぐ</a:t>
             </a:r>
           </a:p>
         </p:txBody>
@@ -5154,8 +5014,8 @@
         </p:nvSpPr>
         <p:spPr>
           <a:xfrm>
-            <a:off x="594360" y="2258568"/>
-            <a:ext cx="11002975" cy="685800"/>
+            <a:off x="640080" y="2052828"/>
+            <a:ext cx="10911535" cy="731520"/>
           </a:xfrm>
           <a:prstGeom prst="rect">
             <a:avLst/>
@@ -5170,7 +5030,7 @@
           <a:p>
             <a:pPr algn="ctr"/>
             <a:r>
-              <a:rPr sz="4400" b="1" i="0">
+              <a:rPr sz="4800" b="1" i="0">
                 <a:solidFill>
                   <a:srgbClr val="FFFFFF"/>
                 </a:solidFill>
@@ -5189,8 +5049,8 @@
         </p:nvSpPr>
         <p:spPr>
           <a:xfrm>
-            <a:off x="594360" y="2980944"/>
-            <a:ext cx="11002975" cy="347472"/>
+            <a:off x="640080" y="2985516"/>
+            <a:ext cx="10911535" cy="731520"/>
           </a:xfrm>
           <a:prstGeom prst="rect">
             <a:avLst/>
@@ -5205,83 +5065,13 @@
           <a:p>
             <a:pPr algn="ctr"/>
             <a:r>
-              <a:rPr sz="2200" b="0" i="1">
-                <a:solidFill>
-                  <a:srgbClr val="8C8C8C"/>
-                </a:solidFill>
-                <a:latin typeface="Arial"/>
-              </a:rPr>
-              <a:t/>
-            </a:r>
-          </a:p>
-        </p:txBody>
-      </p:sp>
-      <p:sp>
-        <p:nvSpPr>
-          <p:cNvPr id="4" name="TextBox 3"/>
-          <p:cNvSpPr txBox="1"/>
-          <p:nvPr/>
-        </p:nvSpPr>
-        <p:spPr>
-          <a:xfrm>
-            <a:off x="594360" y="3529584"/>
-            <a:ext cx="11002975" cy="685800"/>
-          </a:xfrm>
-          <a:prstGeom prst="rect">
-            <a:avLst/>
-          </a:prstGeom>
-          <a:noFill/>
-        </p:spPr>
-        <p:txBody>
-          <a:bodyPr wrap="square">
-            <a:spAutoFit/>
-          </a:bodyPr>
-          <a:lstStyle/>
-          <a:p>
-            <a:pPr algn="ctr"/>
-            <a:r>
-              <a:rPr sz="4400" b="1" i="0">
+              <a:rPr sz="4800" b="1" i="0">
                 <a:solidFill>
                   <a:srgbClr val="FFFFFF"/>
                 </a:solidFill>
                 <a:latin typeface="Arial"/>
               </a:rPr>
               <a:t>E eu anseio por Te adorar</a:t>
-            </a:r>
-          </a:p>
-        </p:txBody>
-      </p:sp>
-      <p:sp>
-        <p:nvSpPr>
-          <p:cNvPr id="5" name="TextBox 4"/>
-          <p:cNvSpPr txBox="1"/>
-          <p:nvPr/>
-        </p:nvSpPr>
-        <p:spPr>
-          <a:xfrm>
-            <a:off x="594360" y="4251960"/>
-            <a:ext cx="11002975" cy="347472"/>
-          </a:xfrm>
-          <a:prstGeom prst="rect">
-            <a:avLst/>
-          </a:prstGeom>
-          <a:noFill/>
-        </p:spPr>
-        <p:txBody>
-          <a:bodyPr wrap="square">
-            <a:spAutoFit/>
-          </a:bodyPr>
-          <a:lstStyle/>
-          <a:p>
-            <a:pPr algn="ctr"/>
-            <a:r>
-              <a:rPr sz="2200" b="0" i="1">
-                <a:solidFill>
-                  <a:srgbClr val="8C8C8C"/>
-                </a:solidFill>
-                <a:latin typeface="Arial"/>
-              </a:rPr>
-              <a:t/>
             </a:r>
           </a:p>
         </p:txBody>
@@ -5320,8 +5110,8 @@
         </p:nvSpPr>
         <p:spPr>
           <a:xfrm>
-            <a:off x="594360" y="2258568"/>
-            <a:ext cx="11002975" cy="685800"/>
+            <a:off x="640080" y="2052828"/>
+            <a:ext cx="10911535" cy="731520"/>
           </a:xfrm>
           <a:prstGeom prst="rect">
             <a:avLst/>
@@ -5336,7 +5126,7 @@
           <a:p>
             <a:pPr algn="ctr"/>
             <a:r>
-              <a:rPr sz="4400" b="1" i="0">
+              <a:rPr sz="4800" b="1" i="0">
                 <a:solidFill>
                   <a:srgbClr val="FFFFFF"/>
                 </a:solidFill>
@@ -5355,8 +5145,8 @@
         </p:nvSpPr>
         <p:spPr>
           <a:xfrm>
-            <a:off x="594360" y="2980944"/>
-            <a:ext cx="11002975" cy="347472"/>
+            <a:off x="640080" y="2985516"/>
+            <a:ext cx="10911535" cy="731520"/>
           </a:xfrm>
           <a:prstGeom prst="rect">
             <a:avLst/>
@@ -5371,83 +5161,13 @@
           <a:p>
             <a:pPr algn="ctr"/>
             <a:r>
-              <a:rPr sz="2200" b="0" i="1">
-                <a:solidFill>
-                  <a:srgbClr val="8C8C8C"/>
-                </a:solidFill>
-                <a:latin typeface="Arial"/>
-              </a:rPr>
-              <a:t/>
-            </a:r>
-          </a:p>
-        </p:txBody>
-      </p:sp>
-      <p:sp>
-        <p:nvSpPr>
-          <p:cNvPr id="4" name="TextBox 3"/>
-          <p:cNvSpPr txBox="1"/>
-          <p:nvPr/>
-        </p:nvSpPr>
-        <p:spPr>
-          <a:xfrm>
-            <a:off x="594360" y="3529584"/>
-            <a:ext cx="11002975" cy="685800"/>
-          </a:xfrm>
-          <a:prstGeom prst="rect">
-            <a:avLst/>
-          </a:prstGeom>
-          <a:noFill/>
-        </p:spPr>
-        <p:txBody>
-          <a:bodyPr wrap="square">
-            <a:spAutoFit/>
-          </a:bodyPr>
-          <a:lstStyle/>
-          <a:p>
-            <a:pPr algn="ctr"/>
-            <a:r>
-              <a:rPr sz="4400" b="1" i="0">
+              <a:rPr sz="4800" b="1" i="0">
                 <a:solidFill>
                   <a:srgbClr val="FFFFFF"/>
                 </a:solidFill>
                 <a:latin typeface="Arial"/>
               </a:rPr>
               <a:t>E eu anseio por Te adorar</a:t>
-            </a:r>
-          </a:p>
-        </p:txBody>
-      </p:sp>
-      <p:sp>
-        <p:nvSpPr>
-          <p:cNvPr id="5" name="TextBox 4"/>
-          <p:cNvSpPr txBox="1"/>
-          <p:nvPr/>
-        </p:nvSpPr>
-        <p:spPr>
-          <a:xfrm>
-            <a:off x="594360" y="4251960"/>
-            <a:ext cx="11002975" cy="347472"/>
-          </a:xfrm>
-          <a:prstGeom prst="rect">
-            <a:avLst/>
-          </a:prstGeom>
-          <a:noFill/>
-        </p:spPr>
-        <p:txBody>
-          <a:bodyPr wrap="square">
-            <a:spAutoFit/>
-          </a:bodyPr>
-          <a:lstStyle/>
-          <a:p>
-            <a:pPr algn="ctr"/>
-            <a:r>
-              <a:rPr sz="2200" b="0" i="1">
-                <a:solidFill>
-                  <a:srgbClr val="8C8C8C"/>
-                </a:solidFill>
-                <a:latin typeface="Arial"/>
-              </a:rPr>
-              <a:t/>
             </a:r>
           </a:p>
         </p:txBody>
@@ -5486,8 +5206,8 @@
         </p:nvSpPr>
         <p:spPr>
           <a:xfrm>
-            <a:off x="594360" y="1837944"/>
-            <a:ext cx="11002975" cy="685800"/>
+            <a:off x="640080" y="1650492"/>
+            <a:ext cx="10911535" cy="731520"/>
           </a:xfrm>
           <a:prstGeom prst="rect">
             <a:avLst/>
@@ -5502,7 +5222,7 @@
           <a:p>
             <a:pPr algn="ctr"/>
             <a:r>
-              <a:rPr sz="4400" b="1" i="0">
+              <a:rPr sz="4800" b="1" i="0">
                 <a:solidFill>
                   <a:srgbClr val="FFFFFF"/>
                 </a:solidFill>
@@ -5521,8 +5241,8 @@
         </p:nvSpPr>
         <p:spPr>
           <a:xfrm>
-            <a:off x="594360" y="2560320"/>
-            <a:ext cx="11002975" cy="384048"/>
+            <a:off x="640080" y="2418588"/>
+            <a:ext cx="10911535" cy="365760"/>
           </a:xfrm>
           <a:prstGeom prst="rect">
             <a:avLst/>
@@ -5537,9 +5257,9 @@
           <a:p>
             <a:pPr algn="ctr"/>
             <a:r>
-              <a:rPr sz="2290" b="0" i="1">
-                <a:solidFill>
-                  <a:srgbClr val="B4B4B4"/>
+              <a:rPr sz="2400" b="0" i="1">
+                <a:solidFill>
+                  <a:srgbClr val="AAAAAA"/>
                 </a:solidFill>
                 <a:latin typeface="Arial"/>
               </a:rPr>
@@ -5556,8 +5276,8 @@
         </p:nvSpPr>
         <p:spPr>
           <a:xfrm>
-            <a:off x="594360" y="2980944"/>
-            <a:ext cx="11002975" cy="347472"/>
+            <a:off x="640080" y="2985516"/>
+            <a:ext cx="10911535" cy="731520"/>
           </a:xfrm>
           <a:prstGeom prst="rect">
             <a:avLst/>
@@ -5572,13 +5292,13 @@
           <a:p>
             <a:pPr algn="ctr"/>
             <a:r>
-              <a:rPr sz="2000" b="0" i="1">
-                <a:solidFill>
-                  <a:srgbClr val="8C8C8C"/>
+              <a:rPr sz="4800" b="1" i="0">
+                <a:solidFill>
+                  <a:srgbClr val="FFFFFF"/>
                 </a:solidFill>
                 <a:latin typeface="Arial"/>
               </a:rPr>
-              <a:t/>
+              <a:t>主よわがたましい あなたを</a:t>
             </a:r>
           </a:p>
         </p:txBody>
@@ -5591,8 +5311,8 @@
         </p:nvSpPr>
         <p:spPr>
           <a:xfrm>
-            <a:off x="594360" y="3529584"/>
-            <a:ext cx="11002975" cy="685800"/>
+            <a:off x="640080" y="3753612"/>
+            <a:ext cx="10911535" cy="365760"/>
           </a:xfrm>
           <a:prstGeom prst="rect">
             <a:avLst/>
@@ -5607,13 +5327,13 @@
           <a:p>
             <a:pPr algn="ctr"/>
             <a:r>
-              <a:rPr sz="4400" b="1" i="0">
-                <a:solidFill>
-                  <a:srgbClr val="FFFFFF"/>
+              <a:rPr sz="2400" b="0" i="1">
+                <a:solidFill>
+                  <a:srgbClr val="AAAAAA"/>
                 </a:solidFill>
                 <a:latin typeface="Arial"/>
               </a:rPr>
-              <a:t>主よわがたましい あなたを</a:t>
+              <a:t>shu yo waga tamashii anata wo</a:t>
             </a:r>
           </a:p>
         </p:txBody>
@@ -5626,8 +5346,8 @@
         </p:nvSpPr>
         <p:spPr>
           <a:xfrm>
-            <a:off x="594360" y="4251960"/>
-            <a:ext cx="11002975" cy="384048"/>
+            <a:off x="640080" y="4530852"/>
+            <a:ext cx="10911535" cy="310896"/>
           </a:xfrm>
           <a:prstGeom prst="rect">
             <a:avLst/>
@@ -5642,13 +5362,13 @@
           <a:p>
             <a:pPr algn="ctr"/>
             <a:r>
-              <a:rPr sz="2400" b="0" i="1">
-                <a:solidFill>
-                  <a:srgbClr val="B4B4B4"/>
+              <a:rPr sz="2000" b="0" i="1">
+                <a:solidFill>
+                  <a:srgbClr val="828282"/>
                 </a:solidFill>
                 <a:latin typeface="Arial"/>
               </a:rPr>
-              <a:t>shu yo waga tamashii anata wo</a:t>
+              <a:t>Como o Cervo</a:t>
             </a:r>
           </a:p>
         </p:txBody>
@@ -5661,8 +5381,8 @@
         </p:nvSpPr>
         <p:spPr>
           <a:xfrm>
-            <a:off x="594360" y="4672584"/>
-            <a:ext cx="11002975" cy="347472"/>
+            <a:off x="640080" y="4896612"/>
+            <a:ext cx="10911535" cy="310896"/>
           </a:xfrm>
           <a:prstGeom prst="rect">
             <a:avLst/>
@@ -5679,11 +5399,11 @@
             <a:r>
               <a:rPr sz="2000" b="0" i="1">
                 <a:solidFill>
-                  <a:srgbClr val="8C8C8C"/>
+                  <a:srgbClr val="828282"/>
                 </a:solidFill>
                 <a:latin typeface="Arial"/>
               </a:rPr>
-              <a:t/>
+              <a:t>Como o cervo anseia pelas fontes das águas</a:t>
             </a:r>
           </a:p>
         </p:txBody>
@@ -5722,8 +5442,8 @@
         </p:nvSpPr>
         <p:spPr>
           <a:xfrm>
-            <a:off x="594360" y="2683764"/>
-            <a:ext cx="11002975" cy="685800"/>
+            <a:off x="640080" y="2500884"/>
+            <a:ext cx="10911535" cy="731520"/>
           </a:xfrm>
           <a:prstGeom prst="rect">
             <a:avLst/>
@@ -5738,7 +5458,7 @@
           <a:p>
             <a:pPr algn="ctr"/>
             <a:r>
-              <a:rPr sz="4400" b="1" i="0">
+              <a:rPr sz="4800" b="1" i="0">
                 <a:solidFill>
                   <a:srgbClr val="FFFFFF"/>
                 </a:solidFill>
@@ -5757,8 +5477,8 @@
         </p:nvSpPr>
         <p:spPr>
           <a:xfrm>
-            <a:off x="594360" y="3406140"/>
-            <a:ext cx="11002975" cy="384048"/>
+            <a:off x="640080" y="3268980"/>
+            <a:ext cx="10911535" cy="365760"/>
           </a:xfrm>
           <a:prstGeom prst="rect">
             <a:avLst/>
@@ -5775,7 +5495,7 @@
             <a:r>
               <a:rPr sz="2400" b="0" i="1">
                 <a:solidFill>
-                  <a:srgbClr val="B4B4B4"/>
+                  <a:srgbClr val="AAAAAA"/>
                 </a:solidFill>
                 <a:latin typeface="Arial"/>
               </a:rPr>
@@ -5792,8 +5512,8 @@
         </p:nvSpPr>
         <p:spPr>
           <a:xfrm>
-            <a:off x="594360" y="3826764"/>
-            <a:ext cx="11002975" cy="347472"/>
+            <a:off x="640080" y="4046220"/>
+            <a:ext cx="10911535" cy="310896"/>
           </a:xfrm>
           <a:prstGeom prst="rect">
             <a:avLst/>
@@ -5810,11 +5530,11 @@
             <a:r>
               <a:rPr sz="2000" b="0" i="1">
                 <a:solidFill>
-                  <a:srgbClr val="8C8C8C"/>
+                  <a:srgbClr val="828282"/>
                 </a:solidFill>
                 <a:latin typeface="Arial"/>
               </a:rPr>
-              <a:t/>
+              <a:t>Assim minha alma anseia por Ti, meu Deus</a:t>
             </a:r>
           </a:p>
         </p:txBody>

--- a/output_pptx/As_The_Deer.pptx
+++ b/output_pptx/As_The_Deer.pptx
@@ -4220,6 +4220,76 @@
           </a:p>
         </p:txBody>
       </p:sp>
+      <p:sp>
+        <p:nvSpPr>
+          <p:cNvPr id="4" name="TextBox 3"/>
+          <p:cNvSpPr txBox="1"/>
+          <p:nvPr/>
+        </p:nvSpPr>
+        <p:spPr>
+          <a:xfrm>
+            <a:off x="640080" y="4128516"/>
+            <a:ext cx="10911535" cy="310896"/>
+          </a:xfrm>
+          <a:prstGeom prst="rect">
+            <a:avLst/>
+          </a:prstGeom>
+          <a:noFill/>
+        </p:spPr>
+        <p:txBody>
+          <a:bodyPr wrap="square">
+            <a:spAutoFit/>
+          </a:bodyPr>
+          <a:lstStyle/>
+          <a:p>
+            <a:pPr algn="ctr"/>
+            <a:r>
+              <a:rPr sz="2000" b="0" i="0">
+                <a:solidFill>
+                  <a:srgbClr val="828282"/>
+                </a:solidFill>
+                <a:latin typeface="Arial"/>
+              </a:rPr>
+              <a:t>そして私はあなたを礼拝することを切望しています</a:t>
+            </a:r>
+          </a:p>
+        </p:txBody>
+      </p:sp>
+      <p:sp>
+        <p:nvSpPr>
+          <p:cNvPr id="5" name="TextBox 4"/>
+          <p:cNvSpPr txBox="1"/>
+          <p:nvPr/>
+        </p:nvSpPr>
+        <p:spPr>
+          <a:xfrm>
+            <a:off x="640080" y="4494276"/>
+            <a:ext cx="10911535" cy="310896"/>
+          </a:xfrm>
+          <a:prstGeom prst="rect">
+            <a:avLst/>
+          </a:prstGeom>
+          <a:noFill/>
+        </p:spPr>
+        <p:txBody>
+          <a:bodyPr wrap="square">
+            <a:spAutoFit/>
+          </a:bodyPr>
+          <a:lstStyle/>
+          <a:p>
+            <a:pPr algn="ctr"/>
+            <a:r>
+              <a:rPr sz="2000" b="0" i="0">
+                <a:solidFill>
+                  <a:srgbClr val="828282"/>
+                </a:solidFill>
+                <a:latin typeface="Arial"/>
+              </a:rPr>
+              <a:t>そして私はあなたを礼拝することを切望しています</a:t>
+            </a:r>
+          </a:p>
+        </p:txBody>
+      </p:sp>
     </p:spTree>
   </p:cSld>
   <p:clrMapOvr>
@@ -4316,6 +4386,76 @@
           </a:p>
         </p:txBody>
       </p:sp>
+      <p:sp>
+        <p:nvSpPr>
+          <p:cNvPr id="4" name="TextBox 3"/>
+          <p:cNvSpPr txBox="1"/>
+          <p:nvPr/>
+        </p:nvSpPr>
+        <p:spPr>
+          <a:xfrm>
+            <a:off x="640080" y="4128516"/>
+            <a:ext cx="10911535" cy="310896"/>
+          </a:xfrm>
+          <a:prstGeom prst="rect">
+            <a:avLst/>
+          </a:prstGeom>
+          <a:noFill/>
+        </p:spPr>
+        <p:txBody>
+          <a:bodyPr wrap="square">
+            <a:spAutoFit/>
+          </a:bodyPr>
+          <a:lstStyle/>
+          <a:p>
+            <a:pPr algn="ctr"/>
+            <a:r>
+              <a:rPr sz="2000" b="0" i="0">
+                <a:solidFill>
+                  <a:srgbClr val="828282"/>
+                </a:solidFill>
+                <a:latin typeface="Arial"/>
+              </a:rPr>
+              <a:t>そして私はあなたを礼拝することを切望しています</a:t>
+            </a:r>
+          </a:p>
+        </p:txBody>
+      </p:sp>
+      <p:sp>
+        <p:nvSpPr>
+          <p:cNvPr id="5" name="TextBox 4"/>
+          <p:cNvSpPr txBox="1"/>
+          <p:nvPr/>
+        </p:nvSpPr>
+        <p:spPr>
+          <a:xfrm>
+            <a:off x="640080" y="4494276"/>
+            <a:ext cx="10911535" cy="310896"/>
+          </a:xfrm>
+          <a:prstGeom prst="rect">
+            <a:avLst/>
+          </a:prstGeom>
+          <a:noFill/>
+        </p:spPr>
+        <p:txBody>
+          <a:bodyPr wrap="square">
+            <a:spAutoFit/>
+          </a:bodyPr>
+          <a:lstStyle/>
+          <a:p>
+            <a:pPr algn="ctr"/>
+            <a:r>
+              <a:rPr sz="2000" b="0" i="0">
+                <a:solidFill>
+                  <a:srgbClr val="828282"/>
+                </a:solidFill>
+                <a:latin typeface="Arial"/>
+              </a:rPr>
+              <a:t>そして私はあなたを礼拝することを切望しています</a:t>
+            </a:r>
+          </a:p>
+        </p:txBody>
+      </p:sp>
     </p:spTree>
   </p:cSld>
   <p:clrMapOvr>
@@ -5076,6 +5216,76 @@
           </a:p>
         </p:txBody>
       </p:sp>
+      <p:sp>
+        <p:nvSpPr>
+          <p:cNvPr id="4" name="TextBox 3"/>
+          <p:cNvSpPr txBox="1"/>
+          <p:nvPr/>
+        </p:nvSpPr>
+        <p:spPr>
+          <a:xfrm>
+            <a:off x="640080" y="4128516"/>
+            <a:ext cx="10911535" cy="310896"/>
+          </a:xfrm>
+          <a:prstGeom prst="rect">
+            <a:avLst/>
+          </a:prstGeom>
+          <a:noFill/>
+        </p:spPr>
+        <p:txBody>
+          <a:bodyPr wrap="square">
+            <a:spAutoFit/>
+          </a:bodyPr>
+          <a:lstStyle/>
+          <a:p>
+            <a:pPr algn="ctr"/>
+            <a:r>
+              <a:rPr sz="2000" b="0" i="0">
+                <a:solidFill>
+                  <a:srgbClr val="828282"/>
+                </a:solidFill>
+                <a:latin typeface="Arial"/>
+              </a:rPr>
+              <a:t>そして私はあなたを礼拝することを切望しています</a:t>
+            </a:r>
+          </a:p>
+        </p:txBody>
+      </p:sp>
+      <p:sp>
+        <p:nvSpPr>
+          <p:cNvPr id="5" name="TextBox 4"/>
+          <p:cNvSpPr txBox="1"/>
+          <p:nvPr/>
+        </p:nvSpPr>
+        <p:spPr>
+          <a:xfrm>
+            <a:off x="640080" y="4494276"/>
+            <a:ext cx="10911535" cy="310896"/>
+          </a:xfrm>
+          <a:prstGeom prst="rect">
+            <a:avLst/>
+          </a:prstGeom>
+          <a:noFill/>
+        </p:spPr>
+        <p:txBody>
+          <a:bodyPr wrap="square">
+            <a:spAutoFit/>
+          </a:bodyPr>
+          <a:lstStyle/>
+          <a:p>
+            <a:pPr algn="ctr"/>
+            <a:r>
+              <a:rPr sz="2000" b="0" i="0">
+                <a:solidFill>
+                  <a:srgbClr val="828282"/>
+                </a:solidFill>
+                <a:latin typeface="Arial"/>
+              </a:rPr>
+              <a:t>そして私はあなたを礼拝することを切望しています</a:t>
+            </a:r>
+          </a:p>
+        </p:txBody>
+      </p:sp>
     </p:spTree>
   </p:cSld>
   <p:clrMapOvr>
@@ -5168,6 +5378,76 @@
                 <a:latin typeface="Arial"/>
               </a:rPr>
               <a:t>E eu anseio por Te adorar</a:t>
+            </a:r>
+          </a:p>
+        </p:txBody>
+      </p:sp>
+      <p:sp>
+        <p:nvSpPr>
+          <p:cNvPr id="4" name="TextBox 3"/>
+          <p:cNvSpPr txBox="1"/>
+          <p:nvPr/>
+        </p:nvSpPr>
+        <p:spPr>
+          <a:xfrm>
+            <a:off x="640080" y="4128516"/>
+            <a:ext cx="10911535" cy="310896"/>
+          </a:xfrm>
+          <a:prstGeom prst="rect">
+            <a:avLst/>
+          </a:prstGeom>
+          <a:noFill/>
+        </p:spPr>
+        <p:txBody>
+          <a:bodyPr wrap="square">
+            <a:spAutoFit/>
+          </a:bodyPr>
+          <a:lstStyle/>
+          <a:p>
+            <a:pPr algn="ctr"/>
+            <a:r>
+              <a:rPr sz="2000" b="0" i="0">
+                <a:solidFill>
+                  <a:srgbClr val="828282"/>
+                </a:solidFill>
+                <a:latin typeface="Arial"/>
+              </a:rPr>
+              <a:t>そして私はあなたを礼拝することを切望しています</a:t>
+            </a:r>
+          </a:p>
+        </p:txBody>
+      </p:sp>
+      <p:sp>
+        <p:nvSpPr>
+          <p:cNvPr id="5" name="TextBox 4"/>
+          <p:cNvSpPr txBox="1"/>
+          <p:nvPr/>
+        </p:nvSpPr>
+        <p:spPr>
+          <a:xfrm>
+            <a:off x="640080" y="4494276"/>
+            <a:ext cx="10911535" cy="310896"/>
+          </a:xfrm>
+          <a:prstGeom prst="rect">
+            <a:avLst/>
+          </a:prstGeom>
+          <a:noFill/>
+        </p:spPr>
+        <p:txBody>
+          <a:bodyPr wrap="square">
+            <a:spAutoFit/>
+          </a:bodyPr>
+          <a:lstStyle/>
+          <a:p>
+            <a:pPr algn="ctr"/>
+            <a:r>
+              <a:rPr sz="2000" b="0" i="0">
+                <a:solidFill>
+                  <a:srgbClr val="828282"/>
+                </a:solidFill>
+                <a:latin typeface="Arial"/>
+              </a:rPr>
+              <a:t>そして私はあなたを礼拝することを切望しています</a:t>
             </a:r>
           </a:p>
         </p:txBody>
